--- a/9.Deep_learning/class/11.0 DEEP LEARNING/class_3_module_9_deep learning_Loss_Functions Gradient Descent.pptx
+++ b/9.Deep_learning/class/11.0 DEEP LEARNING/class_3_module_9_deep learning_Loss_Functions Gradient Descent.pptx
@@ -16493,7 +16493,27 @@
                 <a:latin typeface="Google Sans"/>
                 <a:ea typeface="Google Sans"/>
               </a:rPr>
-              <a:t>This method calculates the error for each example in the entire training dataset and only updates the pavery slow for large datasets as it requires processing the entire dataset for each iteration.</a:t>
+              <a:t>This method calculates the error for each example in the </a:t>
+            </a:r>
+            <a:r>
+              <a:rPr sz="1600" b="1" i="0">
+                <a:solidFill>
+                  <a:srgbClr val="001D35"/>
+                </a:solidFill>
+                <a:latin typeface="Google Sans"/>
+                <a:ea typeface="Google Sans"/>
+              </a:rPr>
+              <a:t>entire training dataset</a:t>
+            </a:r>
+            <a:r>
+              <a:rPr sz="1600" b="0" i="0">
+                <a:solidFill>
+                  <a:srgbClr val="001D35"/>
+                </a:solidFill>
+                <a:latin typeface="Google Sans"/>
+                <a:ea typeface="Google Sans"/>
+              </a:rPr>
+              <a:t> and only updates the pavery slow for large datasets as it requires processing the entire dataset for each iteration.</a:t>
             </a:r>
             <a:endParaRPr sz="1600" b="0" i="0">
               <a:solidFill>
@@ -16846,8 +16866,8 @@
         </p:nvSpPr>
         <p:spPr>
           <a:xfrm>
-            <a:off x="3048000" y="2444750"/>
-            <a:ext cx="6096000" cy="1968500"/>
+            <a:off x="1689735" y="5581015"/>
+            <a:ext cx="10502265" cy="581660"/>
           </a:xfrm>
           <a:prstGeom prst="rect">
             <a:avLst/>
@@ -16856,7 +16876,7 @@
         </p:spPr>
         <p:txBody>
           <a:bodyPr wrap="square" rtlCol="0">
-            <a:spAutoFit/>
+            <a:noAutofit/>
           </a:bodyPr>
           <a:p>
             <a:pPr marL="457200" lvl="1" indent="0">
@@ -17315,7 +17335,29 @@
                 <a:ea typeface="Google Sans"/>
                 <a:sym typeface="+mn-ea"/>
               </a:rPr>
-              <a:t> SGD updates parameters after processing each training example, leading to faster but potentially noisier convergence. </a:t>
+              <a:t> SGD updates parameters after processing </a:t>
+            </a:r>
+            <a:r>
+              <a:rPr sz="1600" b="1">
+                <a:solidFill>
+                  <a:srgbClr val="001D35"/>
+                </a:solidFill>
+                <a:latin typeface="Google Sans"/>
+                <a:ea typeface="Google Sans"/>
+                <a:sym typeface="+mn-ea"/>
+              </a:rPr>
+              <a:t>each training example,</a:t>
+            </a:r>
+            <a:r>
+              <a:rPr sz="1600">
+                <a:solidFill>
+                  <a:srgbClr val="001D35"/>
+                </a:solidFill>
+                <a:latin typeface="Google Sans"/>
+                <a:ea typeface="Google Sans"/>
+                <a:sym typeface="+mn-ea"/>
+              </a:rPr>
+              <a:t> leading to faster but potentially noisier convergence. </a:t>
             </a:r>
             <a:endParaRPr sz="1600">
               <a:solidFill>
@@ -17383,7 +17425,29 @@
                 <a:ea typeface="Google Sans"/>
                 <a:sym typeface="+mn-ea"/>
               </a:rPr>
-              <a:t> This method finds a balance between SGD and BGD by processing the data in small batches, updating the parameters after each batch. </a:t>
+              <a:t> This method finds a </a:t>
+            </a:r>
+            <a:r>
+              <a:rPr sz="1600" b="1">
+                <a:solidFill>
+                  <a:srgbClr val="001D35"/>
+                </a:solidFill>
+                <a:latin typeface="Google Sans"/>
+                <a:ea typeface="Google Sans"/>
+                <a:sym typeface="+mn-ea"/>
+              </a:rPr>
+              <a:t>balance between SGD and BGD </a:t>
+            </a:r>
+            <a:r>
+              <a:rPr sz="1600">
+                <a:solidFill>
+                  <a:srgbClr val="001D35"/>
+                </a:solidFill>
+                <a:latin typeface="Google Sans"/>
+                <a:ea typeface="Google Sans"/>
+                <a:sym typeface="+mn-ea"/>
+              </a:rPr>
+              <a:t>by processing the data in small batches, updating the parameters after each batch. </a:t>
             </a:r>
             <a:endParaRPr lang="en-US" sz="1600">
               <a:solidFill>
@@ -22949,7 +23013,7 @@
         </p:blipFill>
         <p:spPr>
           <a:xfrm>
-            <a:off x="219075" y="914400"/>
+            <a:off x="219075" y="927735"/>
             <a:ext cx="6007100" cy="4481830"/>
           </a:xfrm>
           <a:prstGeom prst="rect">
@@ -23014,7 +23078,7 @@
         </p:blipFill>
         <p:spPr>
           <a:xfrm>
-            <a:off x="436880" y="192405"/>
+            <a:off x="436880" y="204470"/>
             <a:ext cx="7501890" cy="4304665"/>
           </a:xfrm>
           <a:prstGeom prst="rect">
